--- a/ppt_review2.pptx
+++ b/ppt_review2.pptx
@@ -3896,7 +3896,7 @@
         <p:spPr>
           <a:xfrm>
             <a:off x="548640" y="1371600"/>
-            <a:ext cx="11064240" cy="5120640"/>
+            <a:ext cx="11064240" cy="3520439"/>
           </a:xfrm>
           <a:prstGeom prst="rect">
             <a:avLst/>
@@ -5236,7 +5236,7 @@
         <p:spPr>
           <a:xfrm>
             <a:off x="548640" y="4389120"/>
-            <a:ext cx="11064240" cy="5120640"/>
+            <a:ext cx="11064240" cy="502919"/>
           </a:xfrm>
           <a:prstGeom prst="rect">
             <a:avLst/>
@@ -6267,7 +6267,7 @@
         <p:spPr>
           <a:xfrm>
             <a:off x="548640" y="4480560"/>
-            <a:ext cx="11064240" cy="5120640"/>
+            <a:ext cx="11064240" cy="411479"/>
           </a:xfrm>
           <a:prstGeom prst="rect">
             <a:avLst/>
